--- a/docs/saturdays_ai/DemoDaySaturdaysAI_HybridRetrieval_Presentacion.pptx
+++ b/docs/saturdays_ai/DemoDaySaturdaysAI_HybridRetrieval_Presentacion.pptx
@@ -2602,8 +2602,8 @@
         </p:nvSpPr>
         <p:spPr>
           <a:xfrm>
-            <a:off x="822960" y="6126480"/>
-            <a:ext cx="10058400" cy="365760"/>
+            <a:off x="822960" y="5577840"/>
+            <a:ext cx="10058400" cy="914400"/>
           </a:xfrm>
           <a:prstGeom prst="rect">
             <a:avLst/>
@@ -2627,9 +2627,27 @@
                 <a:ea typeface="Calibri" pitchFamily="34" charset="-122"/>
                 <a:cs typeface="Calibri" pitchFamily="34" charset="-120"/>
               </a:rPr>
-              <a:t>Francisco Javier Higuera González  ·  Universidad UTE  ·  francisco.higuera@ute.edu.ec</a:t>
-            </a:r>
-            <a:endParaRPr lang="en-US" sz="1200" dirty="0"/>
+              <a:t>Francisco Javier Higuera González  ·  Cristian Guillermo  ·  José Francisco Silva</a:t>
+            </a:r>
+          </a:p>
+          <a:p>
+            <a:pPr indent="0" marL="0">
+              <a:spcBef>
+                <a:spcPts val="400"/>
+              </a:spcBef>
+              <a:buNone/>
+            </a:pPr>
+            <a:r>
+              <a:rPr lang="en-US" sz="1200" dirty="0">
+                <a:solidFill>
+                  <a:srgbClr val="67728F"/>
+                </a:solidFill>
+                <a:latin typeface="Calibri" pitchFamily="34" charset="0"/>
+                <a:ea typeface="Calibri" pitchFamily="34" charset="-122"/>
+                <a:cs typeface="Calibri" pitchFamily="34" charset="-120"/>
+              </a:rPr>
+              <a:t>Unidad Académica Especializada en la Formación Técnica y Tecnológica  ·  Universidad UTE  ·  francisco.higuera@ute.edu.ec</a:t>
+            </a:r>
           </a:p>
         </p:txBody>
       </p:sp>

--- a/docs/saturdays_ai/DemoDaySaturdaysAI_HybridRetrieval_Presentacion.pptx
+++ b/docs/saturdays_ai/DemoDaySaturdaysAI_HybridRetrieval_Presentacion.pptx
@@ -3077,7 +3077,7 @@
                 <a:ea typeface="Calibri" pitchFamily="34" charset="-122"/>
                 <a:cs typeface="Calibri" pitchFamily="34" charset="-120"/>
               </a:rPr>
-              <a:t>• Cifra de aciertos RAG real pendiente de la corrida final en producción.</a:t>
+              <a:t>• Falta validar el checklist con retroalimentación de coordinadores de carrera reales (15/15 mide recuperación, no acuerdo humano-IA).</a:t>
             </a:r>
             <a:endParaRPr lang="en-US" sz="1200" dirty="0"/>
           </a:p>
@@ -9460,7 +9460,7 @@
                 <a:ea typeface="Calibri" pitchFamily="34" charset="-122"/>
                 <a:cs typeface="Calibri" pitchFamily="34" charset="-120"/>
               </a:rPr>
-              <a:t>Pendiente — corrida final en producción con embeddings reales (HPC) recalculados tras el fix de prefijos</a:t>
+              <a:t>15/15 (100%) con RAG, 0/15 con baseline — corrida oficial en producción, 11 de octubre de 2026</a:t>
             </a:r>
             <a:endParaRPr lang="en-US" sz="1300" dirty="0"/>
           </a:p>

--- a/docs/saturdays_ai/DemoDaySaturdaysAI_HybridRetrieval_Presentacion.pptx
+++ b/docs/saturdays_ai/DemoDaySaturdaysAI_HybridRetrieval_Presentacion.pptx
@@ -6591,7 +6591,7 @@
                 <a:ea typeface="Calibri" pitchFamily="34" charset="-122"/>
                 <a:cs typeface="Calibri" pitchFamily="34" charset="-120"/>
               </a:rPr>
-              <a:t>inverso ×2</a:t>
+              <a:t>inverso ×3</a:t>
             </a:r>
             <a:endParaRPr lang="en-US" sz="1100" dirty="0"/>
           </a:p>
@@ -6753,7 +6753,7 @@
                 <a:ea typeface="Cambria" pitchFamily="34" charset="-122"/>
                 <a:cs typeface="Cambria" pitchFamily="34" charset="-120"/>
               </a:rPr>
-              <a:t>vLLM · Qwen2.5-7B-Instruct</a:t>
+              <a:t>vLLM · Qwen2.5-14B-Instruct</a:t>
             </a:r>
             <a:endParaRPr lang="en-US" sz="1300" dirty="0"/>
           </a:p>
@@ -6931,7 +6931,7 @@
                 <a:ea typeface="Calibri" pitchFamily="34" charset="-122"/>
                 <a:cs typeface="Calibri" pitchFamily="34" charset="-120"/>
               </a:rPr>
-              <a:t>1 sola reserva Slurm compartida (límite de la cuenta: 1 job concurrente) — se libera al terminar, costo GPU = 0 el resto del tiempo</a:t>
+              <a:t>2 GPUs dedicadas en 1 sola reserva Slurm (mismo nodo): RAG (vLLM texto 14B) + Tutor IA (vLLM visión 7B) — se liberan al terminar, costo = 0 el resto del tiempo</a:t>
             </a:r>
             <a:endParaRPr lang="en-US" sz="1000" dirty="0"/>
           </a:p>
@@ -8244,7 +8244,7 @@
                           <a:ea typeface="Calibri" pitchFamily="34" charset="-122"/>
                           <a:cs typeface="Calibri" pitchFamily="34" charset="-120"/>
                         </a:rPr>
-                        <a:t>Qwen/Qwen2.5-7B-Instruct</a:t>
+                        <a:t>Qwen/Qwen2.5-14B-Instruct</a:t>
                       </a:r>
                       <a:endParaRPr lang="en-US" sz="1400" dirty="0">
                         <a:latin typeface="Calibri" charset="0"/>
@@ -8680,7 +8680,7 @@
                 <a:ea typeface="Calibri" pitchFamily="34" charset="-122"/>
                 <a:cs typeface="Calibri" pitchFamily="34" charset="-120"/>
               </a:rPr>
-              <a:t>El volumen no exige un vector store dedicado, pero se eligió uno (embebido, más liviano que Chroma) para demostrar el componente de IA. BM25 se sumó para no perder un artículo que comparte una palabra exacta con la consulta pero que el embedding no ubica entre los más similares.</a:t>
+              <a:t>El volumen no exige un vector store dedicado, pero se eligió uno (embebido, más liviano que Chroma) para demostrar el componente de IA. BM25 se sumó para no perder un artículo que comparte una palabra exacta con la consulta pero que el embedding no ubica entre los más similares. El Tutor IA (pistas e imágenes) usa un modelo de visión aparte (Qwen2.5-VL-7B-Instruct) en una segunda GPU — no pasa por esta recuperación.</a:t>
             </a:r>
             <a:endParaRPr lang="en-US" sz="1200" dirty="0"/>
           </a:p>
@@ -8960,7 +8960,7 @@
                 <a:ea typeface="Cambria" pitchFamily="34" charset="-122"/>
                 <a:cs typeface="Cambria" pitchFamily="34" charset="-120"/>
               </a:rPr>
-              <a:t>118</a:t>
+              <a:t>130</a:t>
             </a:r>
             <a:endParaRPr lang="en-US" sz="4800" dirty="0"/>
           </a:p>
@@ -9116,7 +9116,7 @@
                 <a:ea typeface="Cambria" pitchFamily="34" charset="-122"/>
                 <a:cs typeface="Cambria" pitchFamily="34" charset="-120"/>
               </a:rPr>
-              <a:t>372</a:t>
+              <a:t>394</a:t>
             </a:r>
             <a:endParaRPr lang="en-US" sz="4800" dirty="0"/>
           </a:p>
